--- a/Banco_Manha.pptx
+++ b/Banco_Manha.pptx
@@ -106,6 +106,11 @@
       </a:defRPr>
     </a:lvl9pPr>
   </p:defaultTextStyle>
+  <p:extLst>
+    <p:ext uri="{EFAFB233-063F-42B5-8137-9DF3F51BA10A}">
+      <p15:sldGuideLst xmlns:p15="http://schemas.microsoft.com/office/powerpoint/2012/main"/>
+    </p:ext>
+  </p:extLst>
 </p:presentation>
 </file>
 
@@ -256,7 +261,7 @@
           <a:p>
             <a:fld id="{F9FA09E6-B245-42BA-AC3A-DCB332173046}" type="datetimeFigureOut">
               <a:rPr lang="pt-BR" smtClean="0"/>
-              <a:t>15/06/2026</a:t>
+              <a:t>22/06/2026</a:t>
             </a:fld>
             <a:endParaRPr lang="pt-BR"/>
           </a:p>
@@ -454,7 +459,7 @@
           <a:p>
             <a:fld id="{F9FA09E6-B245-42BA-AC3A-DCB332173046}" type="datetimeFigureOut">
               <a:rPr lang="pt-BR" smtClean="0"/>
-              <a:t>15/06/2026</a:t>
+              <a:t>22/06/2026</a:t>
             </a:fld>
             <a:endParaRPr lang="pt-BR"/>
           </a:p>
@@ -662,7 +667,7 @@
           <a:p>
             <a:fld id="{F9FA09E6-B245-42BA-AC3A-DCB332173046}" type="datetimeFigureOut">
               <a:rPr lang="pt-BR" smtClean="0"/>
-              <a:t>15/06/2026</a:t>
+              <a:t>22/06/2026</a:t>
             </a:fld>
             <a:endParaRPr lang="pt-BR"/>
           </a:p>
@@ -860,7 +865,7 @@
           <a:p>
             <a:fld id="{F9FA09E6-B245-42BA-AC3A-DCB332173046}" type="datetimeFigureOut">
               <a:rPr lang="pt-BR" smtClean="0"/>
-              <a:t>15/06/2026</a:t>
+              <a:t>22/06/2026</a:t>
             </a:fld>
             <a:endParaRPr lang="pt-BR"/>
           </a:p>
@@ -1135,7 +1140,7 @@
           <a:p>
             <a:fld id="{F9FA09E6-B245-42BA-AC3A-DCB332173046}" type="datetimeFigureOut">
               <a:rPr lang="pt-BR" smtClean="0"/>
-              <a:t>15/06/2026</a:t>
+              <a:t>22/06/2026</a:t>
             </a:fld>
             <a:endParaRPr lang="pt-BR"/>
           </a:p>
@@ -1400,7 +1405,7 @@
           <a:p>
             <a:fld id="{F9FA09E6-B245-42BA-AC3A-DCB332173046}" type="datetimeFigureOut">
               <a:rPr lang="pt-BR" smtClean="0"/>
-              <a:t>15/06/2026</a:t>
+              <a:t>22/06/2026</a:t>
             </a:fld>
             <a:endParaRPr lang="pt-BR"/>
           </a:p>
@@ -1812,7 +1817,7 @@
           <a:p>
             <a:fld id="{F9FA09E6-B245-42BA-AC3A-DCB332173046}" type="datetimeFigureOut">
               <a:rPr lang="pt-BR" smtClean="0"/>
-              <a:t>15/06/2026</a:t>
+              <a:t>22/06/2026</a:t>
             </a:fld>
             <a:endParaRPr lang="pt-BR"/>
           </a:p>
@@ -1953,7 +1958,7 @@
           <a:p>
             <a:fld id="{F9FA09E6-B245-42BA-AC3A-DCB332173046}" type="datetimeFigureOut">
               <a:rPr lang="pt-BR" smtClean="0"/>
-              <a:t>15/06/2026</a:t>
+              <a:t>22/06/2026</a:t>
             </a:fld>
             <a:endParaRPr lang="pt-BR"/>
           </a:p>
@@ -2066,7 +2071,7 @@
           <a:p>
             <a:fld id="{F9FA09E6-B245-42BA-AC3A-DCB332173046}" type="datetimeFigureOut">
               <a:rPr lang="pt-BR" smtClean="0"/>
-              <a:t>15/06/2026</a:t>
+              <a:t>22/06/2026</a:t>
             </a:fld>
             <a:endParaRPr lang="pt-BR"/>
           </a:p>
@@ -2377,7 +2382,7 @@
           <a:p>
             <a:fld id="{F9FA09E6-B245-42BA-AC3A-DCB332173046}" type="datetimeFigureOut">
               <a:rPr lang="pt-BR" smtClean="0"/>
-              <a:t>15/06/2026</a:t>
+              <a:t>22/06/2026</a:t>
             </a:fld>
             <a:endParaRPr lang="pt-BR"/>
           </a:p>
@@ -2665,7 +2670,7 @@
           <a:p>
             <a:fld id="{F9FA09E6-B245-42BA-AC3A-DCB332173046}" type="datetimeFigureOut">
               <a:rPr lang="pt-BR" smtClean="0"/>
-              <a:t>15/06/2026</a:t>
+              <a:t>22/06/2026</a:t>
             </a:fld>
             <a:endParaRPr lang="pt-BR"/>
           </a:p>
@@ -2906,7 +2911,7 @@
           <a:p>
             <a:fld id="{F9FA09E6-B245-42BA-AC3A-DCB332173046}" type="datetimeFigureOut">
               <a:rPr lang="pt-BR" smtClean="0"/>
-              <a:t>15/06/2026</a:t>
+              <a:t>22/06/2026</a:t>
             </a:fld>
             <a:endParaRPr lang="pt-BR"/>
           </a:p>
@@ -3568,6 +3573,36 @@
           </a:prstGeom>
         </p:spPr>
       </p:pic>
+      <p:pic>
+        <p:nvPicPr>
+          <p:cNvPr id="3" name="Imagem 2">
+            <a:extLst>
+              <a:ext uri="{FF2B5EF4-FFF2-40B4-BE49-F238E27FC236}">
+                <a16:creationId xmlns:a16="http://schemas.microsoft.com/office/drawing/2014/main" id="{933798F6-2240-49AB-BE23-6CF333D83B91}"/>
+              </a:ext>
+            </a:extLst>
+          </p:cNvPr>
+          <p:cNvPicPr>
+            <a:picLocks noChangeAspect="1"/>
+          </p:cNvPicPr>
+          <p:nvPr/>
+        </p:nvPicPr>
+        <p:blipFill>
+          <a:blip r:embed="rId3"/>
+          <a:stretch>
+            <a:fillRect/>
+          </a:stretch>
+        </p:blipFill>
+        <p:spPr>
+          <a:xfrm>
+            <a:off x="2971800" y="2347912"/>
+            <a:ext cx="6248400" cy="2162175"/>
+          </a:xfrm>
+          <a:prstGeom prst="rect">
+            <a:avLst/>
+          </a:prstGeom>
+        </p:spPr>
+      </p:pic>
     </p:spTree>
     <p:extLst>
       <p:ext uri="{BB962C8B-B14F-4D97-AF65-F5344CB8AC3E}">
